--- a/public/fun/pack/pptx/newspro/카드뉴스프리미엄_31_알뜰생활팁_머스터드네이비.pptx
+++ b/public/fun/pack/pptx/newspro/카드뉴스프리미엄_31_알뜰생활팁_머스터드네이비.pptx
@@ -113,12 +113,12 @@
   <p:extLst>
     <p:ext uri="{521415D9-36F7-43E2-AB2F-B90AF26B5E84}">
       <p14:sectionLst xmlns:p14="http://schemas.microsoft.com/office/powerpoint/2010/main">
-        <p14:section name="시작" id="{5C0663DB-13FA-4716-9DA3-FC362CF91C4D}">
+        <p14:section name="시작" id="{2841D22E-7DF4-4F4C-8A4C-2D4B27FC50AD}">
           <p14:sldIdLst>
             <p14:sldId id="256"/>
           </p14:sldIdLst>
         </p14:section>
-        <p14:section name="본문" id="{EAB0F2FF-2567-4156-A863-4FF31522B238}">
+        <p14:section name="본문" id="{0744F4E2-77DE-406B-8519-E39A17B9B594}">
           <p14:sldIdLst>
             <p14:sldId id="257"/>
             <p14:sldId id="258"/>
@@ -127,7 +127,7 @@
             <p14:sldId id="261"/>
           </p14:sldIdLst>
         </p14:section>
-        <p14:section name="마무리" id="{9BBD3ED1-7CC2-485D-A9EC-F8BCF509CA57}">
+        <p14:section name="마무리" id="{6479E97B-C184-4AC9-BB2F-87A5492BB4BB}">
           <p14:sldIdLst>
             <p14:sldId id="262"/>
           </p14:sldIdLst>
@@ -1489,7 +1489,7 @@
             </a:lvl1pPr>
           </a:lstStyle>
           <a:p>
-            <a:fld id="{A7DCBFC9-2C19-436B-B438-BD3F3B9E23DD}" type="slidenum">
+            <a:fld id="{71E043FA-0CA1-4B02-BD4A-1046521D5F7B}" type="slidenum">
               <a:rPr lang="en-US"/>
               <a:t>‹#›</a:t>
             </a:fld>
@@ -2180,7 +2180,7 @@
             </a:lvl1pPr>
           </a:lstStyle>
           <a:p>
-            <a:fld id="{C4910647-9D06-446C-A53C-FF0831E6410B}" type="slidenum">
+            <a:fld id="{8FF866AF-ECE3-4F27-A744-552A8681CFFC}" type="slidenum">
               <a:rPr lang="en-US"/>
               <a:t>‹#›</a:t>
             </a:fld>
@@ -2929,7 +2929,7 @@
             </a:lvl1pPr>
           </a:lstStyle>
           <a:p>
-            <a:fld id="{0386A183-8B2C-4074-A026-CF3FF60DEC22}" type="slidenum">
+            <a:fld id="{F5FF839F-AADE-4730-B6D6-B61E1C3711E1}" type="slidenum">
               <a:rPr lang="en-US"/>
               <a:t>‹#›</a:t>
             </a:fld>
@@ -3770,7 +3770,7 @@
           <a:p>
             <a:r>
               <a:rPr lang="ko-KR"/>
-              <a:t>가을 옷 정리하고 알뜰하게 시작하기</a:t>
+              <a:t>옷 정리하고 알뜰하게 시작하기</a:t>
             </a:r>
           </a:p>
         </p:txBody>
@@ -3921,7 +3921,7 @@
           <a:bodyPr/>
           <a:lstStyle/>
           <a:p>
-            <a:fld id="{EA455156-B373-4B27-90C9-D7A72DB2F046}" type="slidenum">
+            <a:fld id="{58804704-4732-47C6-AEF5-44C041F8AFDF}" type="slidenum">
               <a:rPr lang="en-US"/>
               <a:t>‹#›</a:t>
             </a:fld>
@@ -4109,7 +4109,7 @@
           <a:bodyPr/>
           <a:lstStyle/>
           <a:p>
-            <a:fld id="{CC287E1C-4ED1-45B3-BE4A-B9EDF9FF6E4B}" type="slidenum">
+            <a:fld id="{31D8015C-CC92-4A07-A96B-208024925477}" type="slidenum">
               <a:rPr lang="en-US"/>
               <a:t>‹#›</a:t>
             </a:fld>
@@ -4297,7 +4297,7 @@
           <a:bodyPr/>
           <a:lstStyle/>
           <a:p>
-            <a:fld id="{801F2076-BC15-4817-ACF2-BC2432AF9FC3}" type="slidenum">
+            <a:fld id="{C6C651C0-D7E1-4CFA-AA96-46482BE49782}" type="slidenum">
               <a:rPr lang="en-US"/>
               <a:t>‹#›</a:t>
             </a:fld>
@@ -4485,7 +4485,7 @@
           <a:bodyPr/>
           <a:lstStyle/>
           <a:p>
-            <a:fld id="{74B93623-983A-4A85-8CFB-6C634ED6F9D8}" type="slidenum">
+            <a:fld id="{BA31E094-B786-483F-99E4-EC70A13608EA}" type="slidenum">
               <a:rPr lang="en-US"/>
               <a:t>‹#›</a:t>
             </a:fld>
@@ -4673,7 +4673,7 @@
           <a:bodyPr/>
           <a:lstStyle/>
           <a:p>
-            <a:fld id="{4B7C7C48-34FB-4E69-8866-16CF07B2EFBE}" type="slidenum">
+            <a:fld id="{86EC9233-88E8-4FF4-ADE7-E4D7779FE64D}" type="slidenum">
               <a:rPr lang="en-US"/>
               <a:t>‹#›</a:t>
             </a:fld>
